--- a/diploma/Шаблон ВКР неигровой.pptx
+++ b/diploma/Шаблон ВКР неигровой.pptx
@@ -223,7 +223,7 @@
           <a:p>
             <a:fld id="{03A73E7F-7578-4DD4-82FD-40C24D6EA17C}" type="datetimeFigureOut">
               <a:rPr lang="ru-RU" smtClean="0"/>
-              <a:t>08.05.2026</a:t>
+              <a:t>14.05.2026</a:t>
             </a:fld>
             <a:endParaRPr lang="ru-RU" dirty="0"/>
           </a:p>
@@ -2749,7 +2749,7 @@
           <a:p>
             <a:fld id="{592F0D80-164F-4ECE-A815-4FDD83F9BCA5}" type="datetime1">
               <a:rPr lang="ru-RU" smtClean="0"/>
-              <a:t>08.05.2026</a:t>
+              <a:t>14.05.2026</a:t>
             </a:fld>
             <a:endParaRPr lang="ru-RU" dirty="0"/>
           </a:p>
@@ -2932,7 +2932,7 @@
           <a:p>
             <a:fld id="{68F90CD5-AEFD-4FB0-8E05-A24BD20C7889}" type="datetime1">
               <a:rPr lang="ru-RU" smtClean="0"/>
-              <a:t>08.05.2026</a:t>
+              <a:t>14.05.2026</a:t>
             </a:fld>
             <a:endParaRPr lang="ru-RU" dirty="0"/>
           </a:p>
@@ -3125,7 +3125,7 @@
           <a:p>
             <a:fld id="{3045A9A4-3005-430B-8AC7-63EFCE895077}" type="datetime1">
               <a:rPr lang="ru-RU" smtClean="0"/>
-              <a:t>08.05.2026</a:t>
+              <a:t>14.05.2026</a:t>
             </a:fld>
             <a:endParaRPr lang="ru-RU" dirty="0"/>
           </a:p>
@@ -3308,7 +3308,7 @@
           <a:p>
             <a:fld id="{C5B88CD6-BB20-4C52-B81D-B7785C33963A}" type="datetime1">
               <a:rPr lang="ru-RU" smtClean="0"/>
-              <a:t>08.05.2026</a:t>
+              <a:t>14.05.2026</a:t>
             </a:fld>
             <a:endParaRPr lang="ru-RU" dirty="0"/>
           </a:p>
@@ -3568,7 +3568,7 @@
           <a:p>
             <a:fld id="{7D96B67C-FD54-4096-A385-8F8657C73047}" type="datetime1">
               <a:rPr lang="ru-RU" smtClean="0"/>
-              <a:t>08.05.2026</a:t>
+              <a:t>14.05.2026</a:t>
             </a:fld>
             <a:endParaRPr lang="ru-RU" dirty="0"/>
           </a:p>
@@ -3868,7 +3868,7 @@
           <a:p>
             <a:fld id="{BBA176E6-C242-4724-A575-17A3D2DBE5B9}" type="datetime1">
               <a:rPr lang="ru-RU" smtClean="0"/>
-              <a:t>08.05.2026</a:t>
+              <a:t>14.05.2026</a:t>
             </a:fld>
             <a:endParaRPr lang="ru-RU" dirty="0"/>
           </a:p>
@@ -4302,7 +4302,7 @@
           <a:p>
             <a:fld id="{3582084D-7615-4765-BEBB-FC2ADD0D2DA6}" type="datetime1">
               <a:rPr lang="ru-RU" smtClean="0"/>
-              <a:t>08.05.2026</a:t>
+              <a:t>14.05.2026</a:t>
             </a:fld>
             <a:endParaRPr lang="ru-RU" dirty="0"/>
           </a:p>
@@ -4434,7 +4434,7 @@
           <a:p>
             <a:fld id="{6D9003A1-BF28-48BC-9995-A08902293C2F}" type="datetime1">
               <a:rPr lang="ru-RU" smtClean="0"/>
-              <a:t>08.05.2026</a:t>
+              <a:t>14.05.2026</a:t>
             </a:fld>
             <a:endParaRPr lang="ru-RU" dirty="0"/>
           </a:p>
@@ -4544,7 +4544,7 @@
           <a:p>
             <a:fld id="{A53E2774-8C0E-4227-8A4F-13D7074C7957}" type="datetime1">
               <a:rPr lang="ru-RU" smtClean="0"/>
-              <a:t>08.05.2026</a:t>
+              <a:t>14.05.2026</a:t>
             </a:fld>
             <a:endParaRPr lang="ru-RU" dirty="0"/>
           </a:p>
@@ -4834,7 +4834,7 @@
           <a:p>
             <a:fld id="{BF9D009E-B0BA-40F4-9409-BAD477F7AA27}" type="datetime1">
               <a:rPr lang="ru-RU" smtClean="0"/>
-              <a:t>08.05.2026</a:t>
+              <a:t>14.05.2026</a:t>
             </a:fld>
             <a:endParaRPr lang="ru-RU" dirty="0"/>
           </a:p>
@@ -5104,7 +5104,7 @@
           <a:p>
             <a:fld id="{2D6E8B98-2144-49DA-A188-3A9AAE81BE8F}" type="datetime1">
               <a:rPr lang="ru-RU" smtClean="0"/>
-              <a:t>08.05.2026</a:t>
+              <a:t>14.05.2026</a:t>
             </a:fld>
             <a:endParaRPr lang="ru-RU" dirty="0"/>
           </a:p>
@@ -5339,7 +5339,7 @@
           <a:p>
             <a:fld id="{4F0E7E8C-EA9C-421C-A5E1-3533048FB457}" type="datetime1">
               <a:rPr lang="ru-RU" smtClean="0"/>
-              <a:t>08.05.2026</a:t>
+              <a:t>14.05.2026</a:t>
             </a:fld>
             <a:endParaRPr lang="ru-RU" dirty="0"/>
           </a:p>
@@ -6151,13 +6151,13 @@
   <p:clrMapOvr>
     <a:masterClrMapping/>
   </p:clrMapOvr>
-  <mc:AlternateContent xmlns:mc="http://schemas.openxmlformats.org/markup-compatibility/2006">
-    <mc:Choice xmlns:p14="http://schemas.microsoft.com/office/powerpoint/2010/main" Requires="p14">
+  <mc:AlternateContent xmlns:mc="http://schemas.openxmlformats.org/markup-compatibility/2006" xmlns:p14="http://schemas.microsoft.com/office/powerpoint/2010/main">
+    <mc:Choice Requires="p14">
       <p:transition spd="slow" p14:dur="1500">
         <p14:window dir="vert"/>
       </p:transition>
     </mc:Choice>
-    <mc:Fallback>
+    <mc:Fallback xmlns="">
       <p:transition spd="slow">
         <p:fade/>
       </p:transition>
@@ -7889,13 +7889,13 @@
   <p:clrMapOvr>
     <a:masterClrMapping/>
   </p:clrMapOvr>
-  <mc:AlternateContent xmlns:mc="http://schemas.openxmlformats.org/markup-compatibility/2006">
-    <mc:Choice xmlns:p14="http://schemas.microsoft.com/office/powerpoint/2010/main" Requires="p14">
+  <mc:AlternateContent xmlns:mc="http://schemas.openxmlformats.org/markup-compatibility/2006" xmlns:p14="http://schemas.microsoft.com/office/powerpoint/2010/main">
+    <mc:Choice Requires="p14">
       <p:transition spd="slow" p14:dur="1500">
         <p14:window dir="vert"/>
       </p:transition>
     </mc:Choice>
-    <mc:Fallback>
+    <mc:Fallback xmlns="">
       <p:transition spd="slow">
         <p:fade/>
       </p:transition>
@@ -8513,13 +8513,13 @@
   <p:clrMapOvr>
     <a:masterClrMapping/>
   </p:clrMapOvr>
-  <mc:AlternateContent xmlns:mc="http://schemas.openxmlformats.org/markup-compatibility/2006">
-    <mc:Choice xmlns:p14="http://schemas.microsoft.com/office/powerpoint/2010/main" Requires="p14">
+  <mc:AlternateContent xmlns:mc="http://schemas.openxmlformats.org/markup-compatibility/2006" xmlns:p14="http://schemas.microsoft.com/office/powerpoint/2010/main">
+    <mc:Choice Requires="p14">
       <p:transition spd="slow" p14:dur="1500">
         <p14:window dir="vert"/>
       </p:transition>
     </mc:Choice>
-    <mc:Fallback>
+    <mc:Fallback xmlns="">
       <p:transition spd="slow">
         <p:fade/>
       </p:transition>
@@ -8699,13 +8699,13 @@
   <p:clrMapOvr>
     <a:masterClrMapping/>
   </p:clrMapOvr>
-  <mc:AlternateContent xmlns:mc="http://schemas.openxmlformats.org/markup-compatibility/2006">
-    <mc:Choice xmlns:p14="http://schemas.microsoft.com/office/powerpoint/2010/main" Requires="p14">
+  <mc:AlternateContent xmlns:mc="http://schemas.openxmlformats.org/markup-compatibility/2006" xmlns:p14="http://schemas.microsoft.com/office/powerpoint/2010/main">
+    <mc:Choice Requires="p14">
       <p:transition spd="slow" p14:dur="1500">
         <p14:window dir="vert"/>
       </p:transition>
     </mc:Choice>
-    <mc:Fallback>
+    <mc:Fallback xmlns="">
       <p:transition spd="slow">
         <p:fade/>
       </p:transition>
@@ -9460,13 +9460,13 @@
   <p:clrMapOvr>
     <a:masterClrMapping/>
   </p:clrMapOvr>
-  <mc:AlternateContent xmlns:mc="http://schemas.openxmlformats.org/markup-compatibility/2006">
-    <mc:Choice xmlns:p14="http://schemas.microsoft.com/office/powerpoint/2010/main" Requires="p14">
+  <mc:AlternateContent xmlns:mc="http://schemas.openxmlformats.org/markup-compatibility/2006" xmlns:p14="http://schemas.microsoft.com/office/powerpoint/2010/main">
+    <mc:Choice Requires="p14">
       <p:transition spd="slow" p14:dur="1500">
         <p14:window dir="vert"/>
       </p:transition>
     </mc:Choice>
-    <mc:Fallback>
+    <mc:Fallback xmlns="">
       <p:transition spd="slow">
         <p:fade/>
       </p:transition>
@@ -10018,7 +10018,7 @@
         </p:nvGraphicFramePr>
         <p:xfrm>
           <a:off x="467543" y="1748178"/>
-          <a:ext cx="7632852" cy="1005840"/>
+          <a:ext cx="7632852" cy="1280160"/>
         </p:xfrm>
         <a:graphic>
           <a:graphicData uri="http://schemas.openxmlformats.org/drawingml/2006/table">
@@ -11581,13 +11581,13 @@
   <p:clrMapOvr>
     <a:masterClrMapping/>
   </p:clrMapOvr>
-  <mc:AlternateContent xmlns:mc="http://schemas.openxmlformats.org/markup-compatibility/2006">
-    <mc:Choice xmlns:p14="http://schemas.microsoft.com/office/powerpoint/2010/main" Requires="p14">
+  <mc:AlternateContent xmlns:mc="http://schemas.openxmlformats.org/markup-compatibility/2006" xmlns:p14="http://schemas.microsoft.com/office/powerpoint/2010/main">
+    <mc:Choice Requires="p14">
       <p:transition spd="slow" p14:dur="1500">
         <p14:window dir="vert"/>
       </p:transition>
     </mc:Choice>
-    <mc:Fallback>
+    <mc:Fallback xmlns="">
       <p:transition spd="slow">
         <p:fade/>
       </p:transition>
